--- a/assets/powerpoints/module-procedure/A2-trois-sons-du-bureau.pptx
+++ b/assets/powerpoints/module-procedure/A2-trois-sons-du-bureau.pptx
@@ -4578,7 +4578,7 @@
                 </a:solidFill>
                 <a:latin typeface="Verdana"/>
               </a:rPr>
-              <a:t>SÉANCE A2  ·  MODULE 4</a:t>
+              <a:t>SÉANCE A2  ·  MODULE 5</a:t>
             </a:r>
           </a:p>
         </p:txBody>

--- a/assets/powerpoints/module-procedure/A2-trois-sons-du-bureau.pptx
+++ b/assets/powerpoints/module-procedure/A2-trois-sons-du-bureau.pptx
@@ -4574,7 +4574,7 @@
             <a:r>
               <a:rPr sz="1300" b="1" i="0" spc="156">
                 <a:solidFill>
-                  <a:srgbClr val="6B4FBB"/>
+                  <a:srgbClr val="3B49A0"/>
                 </a:solidFill>
                 <a:latin typeface="Verdana"/>
               </a:rPr>
@@ -4914,7 +4914,7 @@
             <a:r>
               <a:rPr sz="1300" b="1" i="0" spc="156">
                 <a:solidFill>
-                  <a:srgbClr val="6B4FBB"/>
+                  <a:srgbClr val="3B49A0"/>
                 </a:solidFill>
                 <a:latin typeface="Verdana"/>
               </a:rPr>
@@ -5463,7 +5463,7 @@
             <a:r>
               <a:rPr sz="1300" b="1" i="0" spc="156">
                 <a:solidFill>
-                  <a:srgbClr val="6B4FBB"/>
+                  <a:srgbClr val="3B49A0"/>
                 </a:solidFill>
                 <a:latin typeface="Verdana"/>
               </a:rPr>
@@ -5613,7 +5613,7 @@
             </a:avLst>
           </a:prstGeom>
           <a:solidFill>
-            <a:srgbClr val="EFEAFA"/>
+            <a:srgbClr val="E8EAFA"/>
           </a:solidFill>
           <a:ln>
             <a:noFill/>
@@ -5670,7 +5670,7 @@
             <a:r>
               <a:rPr sz="1500" b="1" i="0">
                 <a:solidFill>
-                  <a:srgbClr val="6B4FBB"/>
+                  <a:srgbClr val="3B49A0"/>
                 </a:solidFill>
                 <a:latin typeface="Verdana"/>
               </a:rPr>
@@ -5781,7 +5781,7 @@
             </a:avLst>
           </a:prstGeom>
           <a:solidFill>
-            <a:srgbClr val="EFEAFA"/>
+            <a:srgbClr val="E8EAFA"/>
           </a:solidFill>
           <a:ln>
             <a:noFill/>
@@ -5838,7 +5838,7 @@
             <a:r>
               <a:rPr sz="1500" b="1" i="0">
                 <a:solidFill>
-                  <a:srgbClr val="6B4FBB"/>
+                  <a:srgbClr val="3B49A0"/>
                 </a:solidFill>
                 <a:latin typeface="Verdana"/>
               </a:rPr>
@@ -5949,7 +5949,7 @@
             </a:avLst>
           </a:prstGeom>
           <a:solidFill>
-            <a:srgbClr val="EFEAFA"/>
+            <a:srgbClr val="E8EAFA"/>
           </a:solidFill>
           <a:ln>
             <a:noFill/>
@@ -6006,7 +6006,7 @@
             <a:r>
               <a:rPr sz="1500" b="1" i="0">
                 <a:solidFill>
-                  <a:srgbClr val="6B4FBB"/>
+                  <a:srgbClr val="3B49A0"/>
                 </a:solidFill>
                 <a:latin typeface="Verdana"/>
               </a:rPr>
@@ -6117,7 +6117,7 @@
             </a:avLst>
           </a:prstGeom>
           <a:solidFill>
-            <a:srgbClr val="EFEAFA"/>
+            <a:srgbClr val="E8EAFA"/>
           </a:solidFill>
           <a:ln>
             <a:noFill/>
@@ -6174,7 +6174,7 @@
             <a:r>
               <a:rPr sz="1500" b="1" i="0">
                 <a:solidFill>
-                  <a:srgbClr val="6B4FBB"/>
+                  <a:srgbClr val="3B49A0"/>
                 </a:solidFill>
                 <a:latin typeface="Verdana"/>
               </a:rPr>
@@ -6285,7 +6285,7 @@
             </a:avLst>
           </a:prstGeom>
           <a:solidFill>
-            <a:srgbClr val="EFEAFA"/>
+            <a:srgbClr val="E8EAFA"/>
           </a:solidFill>
           <a:ln>
             <a:noFill/>
@@ -6342,7 +6342,7 @@
             <a:r>
               <a:rPr sz="1500" b="1" i="0">
                 <a:solidFill>
-                  <a:srgbClr val="6B4FBB"/>
+                  <a:srgbClr val="3B49A0"/>
                 </a:solidFill>
                 <a:latin typeface="Verdana"/>
               </a:rPr>
@@ -6453,7 +6453,7 @@
             </a:avLst>
           </a:prstGeom>
           <a:solidFill>
-            <a:srgbClr val="EFEAFA"/>
+            <a:srgbClr val="E8EAFA"/>
           </a:solidFill>
           <a:ln>
             <a:noFill/>
@@ -6510,7 +6510,7 @@
             <a:r>
               <a:rPr sz="1500" b="1" i="0">
                 <a:solidFill>
-                  <a:srgbClr val="6B4FBB"/>
+                  <a:srgbClr val="3B49A0"/>
                 </a:solidFill>
                 <a:latin typeface="Verdana"/>
               </a:rPr>
@@ -6726,7 +6726,7 @@
             <a:r>
               <a:rPr sz="1300" b="1" i="0" spc="156">
                 <a:solidFill>
-                  <a:srgbClr val="6B4FBB"/>
+                  <a:srgbClr val="3B49A0"/>
                 </a:solidFill>
                 <a:latin typeface="Verdana"/>
               </a:rPr>
@@ -6876,7 +6876,7 @@
             </a:avLst>
           </a:prstGeom>
           <a:solidFill>
-            <a:srgbClr val="EFEAFA"/>
+            <a:srgbClr val="E8EAFA"/>
           </a:solidFill>
           <a:ln>
             <a:noFill/>
@@ -6933,7 +6933,7 @@
             <a:r>
               <a:rPr sz="1500" b="1" i="0">
                 <a:solidFill>
-                  <a:srgbClr val="6B4FBB"/>
+                  <a:srgbClr val="3B49A0"/>
                 </a:solidFill>
                 <a:latin typeface="Verdana"/>
               </a:rPr>
@@ -7053,7 +7053,7 @@
             </a:avLst>
           </a:prstGeom>
           <a:solidFill>
-            <a:srgbClr val="EFEAFA"/>
+            <a:srgbClr val="E8EAFA"/>
           </a:solidFill>
           <a:ln>
             <a:noFill/>
@@ -7110,7 +7110,7 @@
             <a:r>
               <a:rPr sz="1500" b="1" i="0">
                 <a:solidFill>
-                  <a:srgbClr val="6B4FBB"/>
+                  <a:srgbClr val="3B49A0"/>
                 </a:solidFill>
                 <a:latin typeface="Verdana"/>
               </a:rPr>
@@ -7230,7 +7230,7 @@
             </a:avLst>
           </a:prstGeom>
           <a:solidFill>
-            <a:srgbClr val="EFEAFA"/>
+            <a:srgbClr val="E8EAFA"/>
           </a:solidFill>
           <a:ln>
             <a:noFill/>
@@ -7287,7 +7287,7 @@
             <a:r>
               <a:rPr sz="1500" b="1" i="0">
                 <a:solidFill>
-                  <a:srgbClr val="6B4FBB"/>
+                  <a:srgbClr val="3B49A0"/>
                 </a:solidFill>
                 <a:latin typeface="Verdana"/>
               </a:rPr>
@@ -7407,7 +7407,7 @@
             </a:avLst>
           </a:prstGeom>
           <a:solidFill>
-            <a:srgbClr val="EFEAFA"/>
+            <a:srgbClr val="E8EAFA"/>
           </a:solidFill>
           <a:ln>
             <a:noFill/>
@@ -7464,7 +7464,7 @@
             <a:r>
               <a:rPr sz="1500" b="1" i="0">
                 <a:solidFill>
-                  <a:srgbClr val="6B4FBB"/>
+                  <a:srgbClr val="3B49A0"/>
                 </a:solidFill>
                 <a:latin typeface="Verdana"/>
               </a:rPr>
@@ -7584,7 +7584,7 @@
             </a:avLst>
           </a:prstGeom>
           <a:solidFill>
-            <a:srgbClr val="EFEAFA"/>
+            <a:srgbClr val="E8EAFA"/>
           </a:solidFill>
           <a:ln>
             <a:noFill/>
@@ -7641,7 +7641,7 @@
             <a:r>
               <a:rPr sz="1500" b="1" i="0">
                 <a:solidFill>
-                  <a:srgbClr val="6B4FBB"/>
+                  <a:srgbClr val="3B49A0"/>
                 </a:solidFill>
                 <a:latin typeface="Verdana"/>
               </a:rPr>
@@ -7761,7 +7761,7 @@
             </a:avLst>
           </a:prstGeom>
           <a:solidFill>
-            <a:srgbClr val="EFEAFA"/>
+            <a:srgbClr val="E8EAFA"/>
           </a:solidFill>
           <a:ln>
             <a:noFill/>
@@ -7818,7 +7818,7 @@
             <a:r>
               <a:rPr sz="1500" b="1" i="0">
                 <a:solidFill>
-                  <a:srgbClr val="6B4FBB"/>
+                  <a:srgbClr val="3B49A0"/>
                 </a:solidFill>
                 <a:latin typeface="Verdana"/>
               </a:rPr>
@@ -8043,7 +8043,7 @@
             <a:r>
               <a:rPr sz="1300" b="1" i="0" spc="156">
                 <a:solidFill>
-                  <a:srgbClr val="6B4FBB"/>
+                  <a:srgbClr val="3B49A0"/>
                 </a:solidFill>
                 <a:latin typeface="Verdana"/>
               </a:rPr>
@@ -8193,7 +8193,7 @@
             </a:avLst>
           </a:prstGeom>
           <a:solidFill>
-            <a:srgbClr val="EFEAFA"/>
+            <a:srgbClr val="E8EAFA"/>
           </a:solidFill>
           <a:ln>
             <a:noFill/>
@@ -8250,7 +8250,7 @@
             <a:r>
               <a:rPr sz="1500" b="1" i="0">
                 <a:solidFill>
-                  <a:srgbClr val="6B4FBB"/>
+                  <a:srgbClr val="3B49A0"/>
                 </a:solidFill>
                 <a:latin typeface="Verdana"/>
               </a:rPr>
@@ -8361,7 +8361,7 @@
             </a:avLst>
           </a:prstGeom>
           <a:solidFill>
-            <a:srgbClr val="EFEAFA"/>
+            <a:srgbClr val="E8EAFA"/>
           </a:solidFill>
           <a:ln>
             <a:noFill/>
@@ -8418,7 +8418,7 @@
             <a:r>
               <a:rPr sz="1500" b="1" i="0">
                 <a:solidFill>
-                  <a:srgbClr val="6B4FBB"/>
+                  <a:srgbClr val="3B49A0"/>
                 </a:solidFill>
                 <a:latin typeface="Verdana"/>
               </a:rPr>
@@ -8529,7 +8529,7 @@
             </a:avLst>
           </a:prstGeom>
           <a:solidFill>
-            <a:srgbClr val="EFEAFA"/>
+            <a:srgbClr val="E8EAFA"/>
           </a:solidFill>
           <a:ln>
             <a:noFill/>
@@ -8586,7 +8586,7 @@
             <a:r>
               <a:rPr sz="1500" b="1" i="0">
                 <a:solidFill>
-                  <a:srgbClr val="6B4FBB"/>
+                  <a:srgbClr val="3B49A0"/>
                 </a:solidFill>
                 <a:latin typeface="Verdana"/>
               </a:rPr>
@@ -8802,7 +8802,7 @@
             <a:r>
               <a:rPr sz="1300" b="1" i="0" spc="156">
                 <a:solidFill>
-                  <a:srgbClr val="6B4FBB"/>
+                  <a:srgbClr val="3B49A0"/>
                 </a:solidFill>
                 <a:latin typeface="Verdana"/>
               </a:rPr>
@@ -8952,7 +8952,7 @@
             </a:avLst>
           </a:prstGeom>
           <a:solidFill>
-            <a:srgbClr val="EFEAFA"/>
+            <a:srgbClr val="E8EAFA"/>
           </a:solidFill>
           <a:ln>
             <a:noFill/>
@@ -9009,7 +9009,7 @@
             <a:r>
               <a:rPr sz="1500" b="1" i="0">
                 <a:solidFill>
-                  <a:srgbClr val="6B4FBB"/>
+                  <a:srgbClr val="3B49A0"/>
                 </a:solidFill>
                 <a:latin typeface="Verdana"/>
               </a:rPr>
@@ -9129,7 +9129,7 @@
             </a:avLst>
           </a:prstGeom>
           <a:solidFill>
-            <a:srgbClr val="EFEAFA"/>
+            <a:srgbClr val="E8EAFA"/>
           </a:solidFill>
           <a:ln>
             <a:noFill/>
@@ -9186,7 +9186,7 @@
             <a:r>
               <a:rPr sz="1500" b="1" i="0">
                 <a:solidFill>
-                  <a:srgbClr val="6B4FBB"/>
+                  <a:srgbClr val="3B49A0"/>
                 </a:solidFill>
                 <a:latin typeface="Verdana"/>
               </a:rPr>
@@ -9306,7 +9306,7 @@
             </a:avLst>
           </a:prstGeom>
           <a:solidFill>
-            <a:srgbClr val="EFEAFA"/>
+            <a:srgbClr val="E8EAFA"/>
           </a:solidFill>
           <a:ln>
             <a:noFill/>
@@ -9363,7 +9363,7 @@
             <a:r>
               <a:rPr sz="1500" b="1" i="0">
                 <a:solidFill>
-                  <a:srgbClr val="6B4FBB"/>
+                  <a:srgbClr val="3B49A0"/>
                 </a:solidFill>
                 <a:latin typeface="Verdana"/>
               </a:rPr>
@@ -10051,7 +10051,7 @@
             <a:r>
               <a:rPr sz="1300" b="1" i="0" spc="156">
                 <a:solidFill>
-                  <a:srgbClr val="6B4FBB"/>
+                  <a:srgbClr val="3B49A0"/>
                 </a:solidFill>
                 <a:latin typeface="Verdana"/>
               </a:rPr>
@@ -10162,7 +10162,7 @@
             </a:avLst>
           </a:prstGeom>
           <a:solidFill>
-            <a:srgbClr val="EFEAFA"/>
+            <a:srgbClr val="E8EAFA"/>
           </a:solidFill>
           <a:ln>
             <a:noFill/>
@@ -10219,7 +10219,7 @@
             <a:r>
               <a:rPr sz="1500" b="1" i="0">
                 <a:solidFill>
-                  <a:srgbClr val="6B4FBB"/>
+                  <a:srgbClr val="3B49A0"/>
                 </a:solidFill>
                 <a:latin typeface="Verdana"/>
               </a:rPr>
@@ -10330,7 +10330,7 @@
             </a:avLst>
           </a:prstGeom>
           <a:solidFill>
-            <a:srgbClr val="EFEAFA"/>
+            <a:srgbClr val="E8EAFA"/>
           </a:solidFill>
           <a:ln>
             <a:noFill/>
@@ -10387,7 +10387,7 @@
             <a:r>
               <a:rPr sz="1500" b="1" i="0">
                 <a:solidFill>
-                  <a:srgbClr val="6B4FBB"/>
+                  <a:srgbClr val="3B49A0"/>
                 </a:solidFill>
                 <a:latin typeface="Verdana"/>
               </a:rPr>
@@ -10498,7 +10498,7 @@
             </a:avLst>
           </a:prstGeom>
           <a:solidFill>
-            <a:srgbClr val="EFEAFA"/>
+            <a:srgbClr val="E8EAFA"/>
           </a:solidFill>
           <a:ln>
             <a:noFill/>
@@ -10555,7 +10555,7 @@
             <a:r>
               <a:rPr sz="1500" b="1" i="0">
                 <a:solidFill>
-                  <a:srgbClr val="6B4FBB"/>
+                  <a:srgbClr val="3B49A0"/>
                 </a:solidFill>
                 <a:latin typeface="Verdana"/>
               </a:rPr>
@@ -10666,7 +10666,7 @@
             </a:avLst>
           </a:prstGeom>
           <a:solidFill>
-            <a:srgbClr val="EFEAFA"/>
+            <a:srgbClr val="E8EAFA"/>
           </a:solidFill>
           <a:ln>
             <a:noFill/>
@@ -10723,7 +10723,7 @@
             <a:r>
               <a:rPr sz="1500" b="1" i="0">
                 <a:solidFill>
-                  <a:srgbClr val="6B4FBB"/>
+                  <a:srgbClr val="3B49A0"/>
                 </a:solidFill>
                 <a:latin typeface="Verdana"/>
               </a:rPr>
@@ -10939,7 +10939,7 @@
             <a:r>
               <a:rPr sz="1300" b="1" i="0" spc="156">
                 <a:solidFill>
-                  <a:srgbClr val="6B4FBB"/>
+                  <a:srgbClr val="3B49A0"/>
                 </a:solidFill>
                 <a:latin typeface="Verdana"/>
               </a:rPr>
@@ -11180,7 +11180,7 @@
             <a:r>
               <a:rPr sz="1800" b="1" i="0">
                 <a:solidFill>
-                  <a:srgbClr val="6B4FBB"/>
+                  <a:srgbClr val="3B49A0"/>
                 </a:solidFill>
                 <a:latin typeface="Verdana"/>
               </a:rPr>
@@ -11339,7 +11339,7 @@
             <a:r>
               <a:rPr sz="1800" b="1" i="0">
                 <a:solidFill>
-                  <a:srgbClr val="6B4FBB"/>
+                  <a:srgbClr val="3B49A0"/>
                 </a:solidFill>
                 <a:latin typeface="Verdana"/>
               </a:rPr>
@@ -11498,7 +11498,7 @@
             <a:r>
               <a:rPr sz="1800" b="1" i="0">
                 <a:solidFill>
-                  <a:srgbClr val="6B4FBB"/>
+                  <a:srgbClr val="3B49A0"/>
                 </a:solidFill>
                 <a:latin typeface="Verdana"/>
               </a:rPr>
@@ -11838,7 +11838,7 @@
             <a:r>
               <a:rPr sz="1300" b="1" i="0" spc="156">
                 <a:solidFill>
-                  <a:srgbClr val="6B4FBB"/>
+                  <a:srgbClr val="3B49A0"/>
                 </a:solidFill>
                 <a:latin typeface="Verdana"/>
               </a:rPr>
@@ -11864,7 +11864,7 @@
             </a:avLst>
           </a:prstGeom>
           <a:solidFill>
-            <a:srgbClr val="EFEAFA"/>
+            <a:srgbClr val="E8EAFA"/>
           </a:solidFill>
           <a:ln w="12700">
             <a:solidFill>
@@ -12185,7 +12185,7 @@
             <a:r>
               <a:rPr sz="1300" b="1" i="0" spc="156">
                 <a:solidFill>
-                  <a:srgbClr val="6B4FBB"/>
+                  <a:srgbClr val="3B49A0"/>
                 </a:solidFill>
                 <a:latin typeface="Verdana"/>
               </a:rPr>
@@ -12211,7 +12211,7 @@
             </a:avLst>
           </a:prstGeom>
           <a:solidFill>
-            <a:srgbClr val="EFEAFA"/>
+            <a:srgbClr val="E8EAFA"/>
           </a:solidFill>
           <a:ln w="12700">
             <a:solidFill>
@@ -12532,7 +12532,7 @@
             <a:r>
               <a:rPr sz="1300" b="1" i="0" spc="156">
                 <a:solidFill>
-                  <a:srgbClr val="6B4FBB"/>
+                  <a:srgbClr val="3B49A0"/>
                 </a:solidFill>
                 <a:latin typeface="Verdana"/>
               </a:rPr>
@@ -12656,7 +12656,7 @@
             <a:r>
               <a:rPr sz="2100" b="1" i="0">
                 <a:solidFill>
-                  <a:srgbClr val="6B4FBB"/>
+                  <a:srgbClr val="3B49A0"/>
                 </a:solidFill>
                 <a:latin typeface="Verdana"/>
               </a:rPr>
@@ -12780,7 +12780,7 @@
             <a:r>
               <a:rPr sz="2100" b="1" i="0">
                 <a:solidFill>
-                  <a:srgbClr val="6B4FBB"/>
+                  <a:srgbClr val="3B49A0"/>
                 </a:solidFill>
                 <a:latin typeface="Verdana"/>
               </a:rPr>
@@ -12904,7 +12904,7 @@
             <a:r>
               <a:rPr sz="2100" b="1" i="0">
                 <a:solidFill>
-                  <a:srgbClr val="6B4FBB"/>
+                  <a:srgbClr val="3B49A0"/>
                 </a:solidFill>
                 <a:latin typeface="Verdana"/>
               </a:rPr>
@@ -13028,7 +13028,7 @@
             <a:r>
               <a:rPr sz="2100" b="1" i="0">
                 <a:solidFill>
-                  <a:srgbClr val="6B4FBB"/>
+                  <a:srgbClr val="3B49A0"/>
                 </a:solidFill>
                 <a:latin typeface="Verdana"/>
               </a:rPr>
@@ -13244,7 +13244,7 @@
             <a:r>
               <a:rPr sz="1300" b="1" i="0" spc="156">
                 <a:solidFill>
-                  <a:srgbClr val="6B4FBB"/>
+                  <a:srgbClr val="3B49A0"/>
                 </a:solidFill>
                 <a:latin typeface="Verdana"/>
               </a:rPr>
@@ -13394,7 +13394,7 @@
             </a:avLst>
           </a:prstGeom>
           <a:solidFill>
-            <a:srgbClr val="EFEAFA"/>
+            <a:srgbClr val="E8EAFA"/>
           </a:solidFill>
           <a:ln>
             <a:noFill/>
@@ -13451,7 +13451,7 @@
             <a:r>
               <a:rPr sz="1500" b="1" i="0">
                 <a:solidFill>
-                  <a:srgbClr val="6B4FBB"/>
+                  <a:srgbClr val="3B49A0"/>
                 </a:solidFill>
                 <a:latin typeface="Verdana"/>
               </a:rPr>
@@ -13562,7 +13562,7 @@
             </a:avLst>
           </a:prstGeom>
           <a:solidFill>
-            <a:srgbClr val="EFEAFA"/>
+            <a:srgbClr val="E8EAFA"/>
           </a:solidFill>
           <a:ln>
             <a:noFill/>
@@ -13619,7 +13619,7 @@
             <a:r>
               <a:rPr sz="1500" b="1" i="0">
                 <a:solidFill>
-                  <a:srgbClr val="6B4FBB"/>
+                  <a:srgbClr val="3B49A0"/>
                 </a:solidFill>
                 <a:latin typeface="Verdana"/>
               </a:rPr>
@@ -13730,7 +13730,7 @@
             </a:avLst>
           </a:prstGeom>
           <a:solidFill>
-            <a:srgbClr val="EFEAFA"/>
+            <a:srgbClr val="E8EAFA"/>
           </a:solidFill>
           <a:ln>
             <a:noFill/>
@@ -13787,7 +13787,7 @@
             <a:r>
               <a:rPr sz="1500" b="1" i="0">
                 <a:solidFill>
-                  <a:srgbClr val="6B4FBB"/>
+                  <a:srgbClr val="3B49A0"/>
                 </a:solidFill>
                 <a:latin typeface="Verdana"/>
               </a:rPr>
@@ -13898,7 +13898,7 @@
             </a:avLst>
           </a:prstGeom>
           <a:solidFill>
-            <a:srgbClr val="EFEAFA"/>
+            <a:srgbClr val="E8EAFA"/>
           </a:solidFill>
           <a:ln>
             <a:noFill/>
@@ -13955,7 +13955,7 @@
             <a:r>
               <a:rPr sz="1500" b="1" i="0">
                 <a:solidFill>
-                  <a:srgbClr val="6B4FBB"/>
+                  <a:srgbClr val="3B49A0"/>
                 </a:solidFill>
                 <a:latin typeface="Verdana"/>
               </a:rPr>
@@ -14066,7 +14066,7 @@
             </a:avLst>
           </a:prstGeom>
           <a:solidFill>
-            <a:srgbClr val="EFEAFA"/>
+            <a:srgbClr val="E8EAFA"/>
           </a:solidFill>
           <a:ln>
             <a:noFill/>
@@ -14123,7 +14123,7 @@
             <a:r>
               <a:rPr sz="1500" b="1" i="0">
                 <a:solidFill>
-                  <a:srgbClr val="6B4FBB"/>
+                  <a:srgbClr val="3B49A0"/>
                 </a:solidFill>
                 <a:latin typeface="Verdana"/>
               </a:rPr>
@@ -14234,7 +14234,7 @@
             </a:avLst>
           </a:prstGeom>
           <a:solidFill>
-            <a:srgbClr val="EFEAFA"/>
+            <a:srgbClr val="E8EAFA"/>
           </a:solidFill>
           <a:ln>
             <a:noFill/>
@@ -14291,7 +14291,7 @@
             <a:r>
               <a:rPr sz="1500" b="1" i="0">
                 <a:solidFill>
-                  <a:srgbClr val="6B4FBB"/>
+                  <a:srgbClr val="3B49A0"/>
                 </a:solidFill>
                 <a:latin typeface="Verdana"/>
               </a:rPr>
@@ -14402,7 +14402,7 @@
             </a:avLst>
           </a:prstGeom>
           <a:solidFill>
-            <a:srgbClr val="EFEAFA"/>
+            <a:srgbClr val="E8EAFA"/>
           </a:solidFill>
           <a:ln>
             <a:noFill/>
@@ -14459,7 +14459,7 @@
             <a:r>
               <a:rPr sz="1500" b="1" i="0">
                 <a:solidFill>
-                  <a:srgbClr val="6B4FBB"/>
+                  <a:srgbClr val="3B49A0"/>
                 </a:solidFill>
                 <a:latin typeface="Verdana"/>
               </a:rPr>
@@ -14570,7 +14570,7 @@
             </a:avLst>
           </a:prstGeom>
           <a:solidFill>
-            <a:srgbClr val="EFEAFA"/>
+            <a:srgbClr val="E8EAFA"/>
           </a:solidFill>
           <a:ln>
             <a:noFill/>
@@ -14627,7 +14627,7 @@
             <a:r>
               <a:rPr sz="1500" b="1" i="0">
                 <a:solidFill>
-                  <a:srgbClr val="6B4FBB"/>
+                  <a:srgbClr val="3B49A0"/>
                 </a:solidFill>
                 <a:latin typeface="Verdana"/>
               </a:rPr>
@@ -14843,7 +14843,7 @@
             <a:r>
               <a:rPr sz="1300" b="1" i="0" spc="156">
                 <a:solidFill>
-                  <a:srgbClr val="6B4FBB"/>
+                  <a:srgbClr val="3B49A0"/>
                 </a:solidFill>
                 <a:latin typeface="Verdana"/>
               </a:rPr>
@@ -14993,7 +14993,7 @@
             </a:avLst>
           </a:prstGeom>
           <a:solidFill>
-            <a:srgbClr val="EFEAFA"/>
+            <a:srgbClr val="E8EAFA"/>
           </a:solidFill>
           <a:ln>
             <a:noFill/>
@@ -15050,7 +15050,7 @@
             <a:r>
               <a:rPr sz="1500" b="1" i="0">
                 <a:solidFill>
-                  <a:srgbClr val="6B4FBB"/>
+                  <a:srgbClr val="3B49A0"/>
                 </a:solidFill>
                 <a:latin typeface="Verdana"/>
               </a:rPr>
@@ -15170,7 +15170,7 @@
             </a:avLst>
           </a:prstGeom>
           <a:solidFill>
-            <a:srgbClr val="EFEAFA"/>
+            <a:srgbClr val="E8EAFA"/>
           </a:solidFill>
           <a:ln>
             <a:noFill/>
@@ -15227,7 +15227,7 @@
             <a:r>
               <a:rPr sz="1500" b="1" i="0">
                 <a:solidFill>
-                  <a:srgbClr val="6B4FBB"/>
+                  <a:srgbClr val="3B49A0"/>
                 </a:solidFill>
                 <a:latin typeface="Verdana"/>
               </a:rPr>
@@ -15347,7 +15347,7 @@
             </a:avLst>
           </a:prstGeom>
           <a:solidFill>
-            <a:srgbClr val="EFEAFA"/>
+            <a:srgbClr val="E8EAFA"/>
           </a:solidFill>
           <a:ln>
             <a:noFill/>
@@ -15404,7 +15404,7 @@
             <a:r>
               <a:rPr sz="1500" b="1" i="0">
                 <a:solidFill>
-                  <a:srgbClr val="6B4FBB"/>
+                  <a:srgbClr val="3B49A0"/>
                 </a:solidFill>
                 <a:latin typeface="Verdana"/>
               </a:rPr>
@@ -15524,7 +15524,7 @@
             </a:avLst>
           </a:prstGeom>
           <a:solidFill>
-            <a:srgbClr val="EFEAFA"/>
+            <a:srgbClr val="E8EAFA"/>
           </a:solidFill>
           <a:ln>
             <a:noFill/>
@@ -15581,7 +15581,7 @@
             <a:r>
               <a:rPr sz="1500" b="1" i="0">
                 <a:solidFill>
-                  <a:srgbClr val="6B4FBB"/>
+                  <a:srgbClr val="3B49A0"/>
                 </a:solidFill>
                 <a:latin typeface="Verdana"/>
               </a:rPr>
@@ -15701,7 +15701,7 @@
             </a:avLst>
           </a:prstGeom>
           <a:solidFill>
-            <a:srgbClr val="EFEAFA"/>
+            <a:srgbClr val="E8EAFA"/>
           </a:solidFill>
           <a:ln>
             <a:noFill/>
@@ -15758,7 +15758,7 @@
             <a:r>
               <a:rPr sz="1500" b="1" i="0">
                 <a:solidFill>
-                  <a:srgbClr val="6B4FBB"/>
+                  <a:srgbClr val="3B49A0"/>
                 </a:solidFill>
                 <a:latin typeface="Verdana"/>
               </a:rPr>
@@ -15878,7 +15878,7 @@
             </a:avLst>
           </a:prstGeom>
           <a:solidFill>
-            <a:srgbClr val="EFEAFA"/>
+            <a:srgbClr val="E8EAFA"/>
           </a:solidFill>
           <a:ln>
             <a:noFill/>
@@ -15935,7 +15935,7 @@
             <a:r>
               <a:rPr sz="1500" b="1" i="0">
                 <a:solidFill>
-                  <a:srgbClr val="6B4FBB"/>
+                  <a:srgbClr val="3B49A0"/>
                 </a:solidFill>
                 <a:latin typeface="Verdana"/>
               </a:rPr>
@@ -16055,7 +16055,7 @@
             </a:avLst>
           </a:prstGeom>
           <a:solidFill>
-            <a:srgbClr val="EFEAFA"/>
+            <a:srgbClr val="E8EAFA"/>
           </a:solidFill>
           <a:ln>
             <a:noFill/>
@@ -16112,7 +16112,7 @@
             <a:r>
               <a:rPr sz="1500" b="1" i="0">
                 <a:solidFill>
-                  <a:srgbClr val="6B4FBB"/>
+                  <a:srgbClr val="3B49A0"/>
                 </a:solidFill>
                 <a:latin typeface="Verdana"/>
               </a:rPr>
@@ -16232,7 +16232,7 @@
             </a:avLst>
           </a:prstGeom>
           <a:solidFill>
-            <a:srgbClr val="EFEAFA"/>
+            <a:srgbClr val="E8EAFA"/>
           </a:solidFill>
           <a:ln>
             <a:noFill/>
@@ -16289,7 +16289,7 @@
             <a:r>
               <a:rPr sz="1500" b="1" i="0">
                 <a:solidFill>
-                  <a:srgbClr val="6B4FBB"/>
+                  <a:srgbClr val="3B49A0"/>
                 </a:solidFill>
                 <a:latin typeface="Verdana"/>
               </a:rPr>
@@ -16514,7 +16514,7 @@
             <a:r>
               <a:rPr sz="1300" b="1" i="0" spc="156">
                 <a:solidFill>
-                  <a:srgbClr val="6B4FBB"/>
+                  <a:srgbClr val="3B49A0"/>
                 </a:solidFill>
                 <a:latin typeface="Verdana"/>
               </a:rPr>

--- a/assets/powerpoints/module-procedure/A2-trois-sons-du-bureau.pptx
+++ b/assets/powerpoints/module-procedure/A2-trois-sons-du-bureau.pptx
@@ -12536,7 +12536,7 @@
                 </a:solidFill>
                 <a:latin typeface="Verdana"/>
               </a:rPr>
-              <a:t>EN APPRENDRE PLUS</a:t>
+              <a:t>OUVRIR LA MINI-LEÇON</a:t>
             </a:r>
           </a:p>
         </p:txBody>
